--- a/lessons/1-2/slides.pptx
+++ b/lessons/1-2/slides.pptx
@@ -11006,7 +11006,7 @@
       </p:sp>
       <p:sp>
         <p:nvSpPr>
-          <p:cNvPr id="20" name="Shape 18"/>
+          <p:cNvPr id="20" name="Text 18"/>
           <p:cNvSpPr/>
           <p:nvPr/>
         </p:nvSpPr>
@@ -11027,33 +11027,7 @@
             <a:solidFill>
               <a:srgbClr val="D6DBDF"/>
             </a:solidFill>
-            <a:prstDash val="solid"/>
           </a:ln>
-          <a:effectLst>
-            <a:outerShdw sx="100000" sy="100000" kx="0" ky="0" algn="bl" rotWithShape="0" blurRad="50800" dist="12700" dir="5400000">
-              <a:srgbClr val="1C2E42">
-                <a:alpha val="10000"/>
-              </a:srgbClr>
-            </a:outerShdw>
-          </a:effectLst>
-        </p:spPr>
-      </p:sp>
-      <p:sp>
-        <p:nvSpPr>
-          <p:cNvPr id="21" name="Text 19"/>
-          <p:cNvSpPr/>
-          <p:nvPr/>
-        </p:nvSpPr>
-        <p:spPr>
-          <a:xfrm>
-            <a:off x="685800" y="1481328"/>
-            <a:ext cx="1447800" cy="384048"/>
-          </a:xfrm>
-          <a:prstGeom prst="rect">
-            <a:avLst/>
-          </a:prstGeom>
-          <a:noFill/>
-          <a:ln/>
         </p:spPr>
         <p:txBody>
           <a:bodyPr wrap="square" rtlCol="0" anchor="ctr"/>
@@ -11063,7 +11037,7 @@
               <a:buNone/>
             </a:pPr>
             <a:r>
-              <a:rPr lang="en-US" sz="900" dirty="0">
+              <a:rPr lang="en-US" sz="900" b="1" dirty="0">
                 <a:solidFill>
                   <a:srgbClr val="17324D"/>
                 </a:solidFill>
@@ -11079,7 +11053,7 @@
       </p:sp>
       <p:sp>
         <p:nvSpPr>
-          <p:cNvPr id="22" name="Shape 20"/>
+          <p:cNvPr id="21" name="Text 19"/>
           <p:cNvSpPr/>
           <p:nvPr/>
         </p:nvSpPr>
@@ -11100,33 +11074,7 @@
             <a:solidFill>
               <a:srgbClr val="D6DBDF"/>
             </a:solidFill>
-            <a:prstDash val="solid"/>
           </a:ln>
-          <a:effectLst>
-            <a:outerShdw sx="100000" sy="100000" kx="0" ky="0" algn="bl" rotWithShape="0" blurRad="50800" dist="12700" dir="5400000">
-              <a:srgbClr val="1C2E42">
-                <a:alpha val="10000"/>
-              </a:srgbClr>
-            </a:outerShdw>
-          </a:effectLst>
-        </p:spPr>
-      </p:sp>
-      <p:sp>
-        <p:nvSpPr>
-          <p:cNvPr id="23" name="Text 21"/>
-          <p:cNvSpPr/>
-          <p:nvPr/>
-        </p:nvSpPr>
-        <p:spPr>
-          <a:xfrm>
-            <a:off x="2453640" y="1481328"/>
-            <a:ext cx="1447800" cy="384048"/>
-          </a:xfrm>
-          <a:prstGeom prst="rect">
-            <a:avLst/>
-          </a:prstGeom>
-          <a:noFill/>
-          <a:ln/>
         </p:spPr>
         <p:txBody>
           <a:bodyPr wrap="square" rtlCol="0" anchor="ctr"/>
@@ -11136,7 +11084,7 @@
               <a:buNone/>
             </a:pPr>
             <a:r>
-              <a:rPr lang="en-US" sz="900" dirty="0">
+              <a:rPr lang="en-US" sz="900" b="1" dirty="0">
                 <a:solidFill>
                   <a:srgbClr val="17324D"/>
                 </a:solidFill>
@@ -11152,7 +11100,7 @@
       </p:sp>
       <p:sp>
         <p:nvSpPr>
-          <p:cNvPr id="24" name="Shape 22"/>
+          <p:cNvPr id="22" name="Text 20"/>
           <p:cNvSpPr/>
           <p:nvPr/>
         </p:nvSpPr>
@@ -11173,33 +11121,7 @@
             <a:solidFill>
               <a:srgbClr val="D6DBDF"/>
             </a:solidFill>
-            <a:prstDash val="solid"/>
           </a:ln>
-          <a:effectLst>
-            <a:outerShdw sx="100000" sy="100000" kx="0" ky="0" algn="bl" rotWithShape="0" blurRad="50800" dist="12700" dir="5400000">
-              <a:srgbClr val="1C2E42">
-                <a:alpha val="10000"/>
-              </a:srgbClr>
-            </a:outerShdw>
-          </a:effectLst>
-        </p:spPr>
-      </p:sp>
-      <p:sp>
-        <p:nvSpPr>
-          <p:cNvPr id="25" name="Text 23"/>
-          <p:cNvSpPr/>
-          <p:nvPr/>
-        </p:nvSpPr>
-        <p:spPr>
-          <a:xfrm>
-            <a:off x="4221480" y="1481328"/>
-            <a:ext cx="1447800" cy="384048"/>
-          </a:xfrm>
-          <a:prstGeom prst="rect">
-            <a:avLst/>
-          </a:prstGeom>
-          <a:noFill/>
-          <a:ln/>
         </p:spPr>
         <p:txBody>
           <a:bodyPr wrap="square" rtlCol="0" anchor="ctr"/>
@@ -11209,7 +11131,7 @@
               <a:buNone/>
             </a:pPr>
             <a:r>
-              <a:rPr lang="en-US" sz="900" dirty="0">
+              <a:rPr lang="en-US" sz="900" b="1" dirty="0">
                 <a:solidFill>
                   <a:srgbClr val="17324D"/>
                 </a:solidFill>
@@ -11225,7 +11147,7 @@
       </p:sp>
       <p:sp>
         <p:nvSpPr>
-          <p:cNvPr id="26" name="Shape 24"/>
+          <p:cNvPr id="23" name="Text 21"/>
           <p:cNvSpPr/>
           <p:nvPr/>
         </p:nvSpPr>
@@ -11246,33 +11168,7 @@
             <a:solidFill>
               <a:srgbClr val="D6DBDF"/>
             </a:solidFill>
-            <a:prstDash val="solid"/>
           </a:ln>
-          <a:effectLst>
-            <a:outerShdw sx="100000" sy="100000" kx="0" ky="0" algn="bl" rotWithShape="0" blurRad="50800" dist="12700" dir="5400000">
-              <a:srgbClr val="1C2E42">
-                <a:alpha val="10000"/>
-              </a:srgbClr>
-            </a:outerShdw>
-          </a:effectLst>
-        </p:spPr>
-      </p:sp>
-      <p:sp>
-        <p:nvSpPr>
-          <p:cNvPr id="27" name="Text 25"/>
-          <p:cNvSpPr/>
-          <p:nvPr/>
-        </p:nvSpPr>
-        <p:spPr>
-          <a:xfrm>
-            <a:off x="685800" y="1975104"/>
-            <a:ext cx="1447800" cy="384048"/>
-          </a:xfrm>
-          <a:prstGeom prst="rect">
-            <a:avLst/>
-          </a:prstGeom>
-          <a:noFill/>
-          <a:ln/>
         </p:spPr>
         <p:txBody>
           <a:bodyPr wrap="square" rtlCol="0" anchor="ctr"/>
@@ -11282,7 +11178,7 @@
               <a:buNone/>
             </a:pPr>
             <a:r>
-              <a:rPr lang="en-US" sz="900" dirty="0">
+              <a:rPr lang="en-US" sz="900" b="1" dirty="0">
                 <a:solidFill>
                   <a:srgbClr val="17324D"/>
                 </a:solidFill>
@@ -11298,7 +11194,7 @@
       </p:sp>
       <p:sp>
         <p:nvSpPr>
-          <p:cNvPr id="28" name="Shape 26"/>
+          <p:cNvPr id="24" name="Text 22"/>
           <p:cNvSpPr/>
           <p:nvPr/>
         </p:nvSpPr>
@@ -11319,33 +11215,7 @@
             <a:solidFill>
               <a:srgbClr val="D6DBDF"/>
             </a:solidFill>
-            <a:prstDash val="solid"/>
           </a:ln>
-          <a:effectLst>
-            <a:outerShdw sx="100000" sy="100000" kx="0" ky="0" algn="bl" rotWithShape="0" blurRad="50800" dist="12700" dir="5400000">
-              <a:srgbClr val="1C2E42">
-                <a:alpha val="10000"/>
-              </a:srgbClr>
-            </a:outerShdw>
-          </a:effectLst>
-        </p:spPr>
-      </p:sp>
-      <p:sp>
-        <p:nvSpPr>
-          <p:cNvPr id="29" name="Text 27"/>
-          <p:cNvSpPr/>
-          <p:nvPr/>
-        </p:nvSpPr>
-        <p:spPr>
-          <a:xfrm>
-            <a:off x="2453640" y="1975104"/>
-            <a:ext cx="1447800" cy="384048"/>
-          </a:xfrm>
-          <a:prstGeom prst="rect">
-            <a:avLst/>
-          </a:prstGeom>
-          <a:noFill/>
-          <a:ln/>
         </p:spPr>
         <p:txBody>
           <a:bodyPr wrap="square" rtlCol="0" anchor="ctr"/>
@@ -11355,7 +11225,7 @@
               <a:buNone/>
             </a:pPr>
             <a:r>
-              <a:rPr lang="en-US" sz="900" dirty="0">
+              <a:rPr lang="en-US" sz="900" b="1" dirty="0">
                 <a:solidFill>
                   <a:srgbClr val="17324D"/>
                 </a:solidFill>
@@ -11371,7 +11241,7 @@
       </p:sp>
       <p:sp>
         <p:nvSpPr>
-          <p:cNvPr id="30" name="Shape 28"/>
+          <p:cNvPr id="25" name="Text 23"/>
           <p:cNvSpPr/>
           <p:nvPr/>
         </p:nvSpPr>
@@ -11392,33 +11262,7 @@
             <a:solidFill>
               <a:srgbClr val="D6DBDF"/>
             </a:solidFill>
-            <a:prstDash val="solid"/>
           </a:ln>
-          <a:effectLst>
-            <a:outerShdw sx="100000" sy="100000" kx="0" ky="0" algn="bl" rotWithShape="0" blurRad="50800" dist="12700" dir="5400000">
-              <a:srgbClr val="1C2E42">
-                <a:alpha val="10000"/>
-              </a:srgbClr>
-            </a:outerShdw>
-          </a:effectLst>
-        </p:spPr>
-      </p:sp>
-      <p:sp>
-        <p:nvSpPr>
-          <p:cNvPr id="31" name="Text 29"/>
-          <p:cNvSpPr/>
-          <p:nvPr/>
-        </p:nvSpPr>
-        <p:spPr>
-          <a:xfrm>
-            <a:off x="4221480" y="1975104"/>
-            <a:ext cx="1447800" cy="384048"/>
-          </a:xfrm>
-          <a:prstGeom prst="rect">
-            <a:avLst/>
-          </a:prstGeom>
-          <a:noFill/>
-          <a:ln/>
         </p:spPr>
         <p:txBody>
           <a:bodyPr wrap="square" rtlCol="0" anchor="ctr"/>
@@ -11428,7 +11272,7 @@
               <a:buNone/>
             </a:pPr>
             <a:r>
-              <a:rPr lang="en-US" sz="900" dirty="0">
+              <a:rPr lang="en-US" sz="900" b="1" dirty="0">
                 <a:solidFill>
                   <a:srgbClr val="17324D"/>
                 </a:solidFill>
@@ -11444,7 +11288,7 @@
       </p:sp>
       <p:sp>
         <p:nvSpPr>
-          <p:cNvPr id="32" name="Shape 30"/>
+          <p:cNvPr id="26" name="Shape 24"/>
           <p:cNvSpPr/>
           <p:nvPr/>
         </p:nvSpPr>
@@ -11478,7 +11322,7 @@
       </p:sp>
       <p:sp>
         <p:nvSpPr>
-          <p:cNvPr id="33" name="Text 31"/>
+          <p:cNvPr id="27" name="Text 25"/>
           <p:cNvSpPr/>
           <p:nvPr/>
         </p:nvSpPr>
@@ -11519,7 +11363,7 @@
       </p:sp>
       <p:sp>
         <p:nvSpPr>
-          <p:cNvPr id="34" name="Shape 32"/>
+          <p:cNvPr id="28" name="Shape 26"/>
           <p:cNvSpPr/>
           <p:nvPr/>
         </p:nvSpPr>
@@ -11553,7 +11397,7 @@
       </p:sp>
       <p:sp>
         <p:nvSpPr>
-          <p:cNvPr id="35" name="Text 33"/>
+          <p:cNvPr id="29" name="Text 27"/>
           <p:cNvSpPr/>
           <p:nvPr/>
         </p:nvSpPr>
@@ -11594,7 +11438,7 @@
       </p:sp>
       <p:sp>
         <p:nvSpPr>
-          <p:cNvPr id="36" name="Shape 34"/>
+          <p:cNvPr id="30" name="Shape 28"/>
           <p:cNvSpPr/>
           <p:nvPr/>
         </p:nvSpPr>
@@ -11628,7 +11472,7 @@
       </p:sp>
       <p:sp>
         <p:nvSpPr>
-          <p:cNvPr id="37" name="Text 35"/>
+          <p:cNvPr id="31" name="Text 29"/>
           <p:cNvSpPr/>
           <p:nvPr/>
         </p:nvSpPr>
@@ -11669,7 +11513,7 @@
       </p:sp>
       <p:sp>
         <p:nvSpPr>
-          <p:cNvPr id="38" name="Text 36"/>
+          <p:cNvPr id="32" name="Text 30"/>
           <p:cNvSpPr/>
           <p:nvPr/>
         </p:nvSpPr>
@@ -11708,7 +11552,7 @@
       </p:sp>
       <p:sp>
         <p:nvSpPr>
-          <p:cNvPr id="39" name="Shape 37"/>
+          <p:cNvPr id="33" name="Shape 31"/>
           <p:cNvSpPr/>
           <p:nvPr/>
         </p:nvSpPr>
@@ -11731,7 +11575,7 @@
       </p:sp>
       <p:sp>
         <p:nvSpPr>
-          <p:cNvPr id="40" name="Shape 38"/>
+          <p:cNvPr id="34" name="Shape 32"/>
           <p:cNvSpPr/>
           <p:nvPr/>
         </p:nvSpPr>
@@ -11754,7 +11598,7 @@
       </p:sp>
       <p:sp>
         <p:nvSpPr>
-          <p:cNvPr id="41" name="Shape 39"/>
+          <p:cNvPr id="35" name="Shape 33"/>
           <p:cNvSpPr/>
           <p:nvPr/>
         </p:nvSpPr>
@@ -11777,7 +11621,7 @@
       </p:sp>
       <p:sp>
         <p:nvSpPr>
-          <p:cNvPr id="42" name="Shape 40"/>
+          <p:cNvPr id="36" name="Shape 34"/>
           <p:cNvSpPr/>
           <p:nvPr/>
         </p:nvSpPr>
@@ -11800,7 +11644,7 @@
       </p:sp>
       <p:sp>
         <p:nvSpPr>
-          <p:cNvPr id="43" name="Shape 41"/>
+          <p:cNvPr id="37" name="Shape 35"/>
           <p:cNvSpPr/>
           <p:nvPr/>
         </p:nvSpPr>

--- a/lessons/1-2/slides.pptx
+++ b/lessons/1-2/slides.pptx
@@ -2584,7 +2584,7 @@
                 <a:ea typeface="Outfit" pitchFamily="34" charset="-122"/>
                 <a:cs typeface="Outfit" pitchFamily="34" charset="-120"/>
               </a:rPr>
-              <a:t>6.NS.4</a:t>
+              <a:t>6.NOS.4</a:t>
             </a:r>
             <a:endParaRPr lang="en-US" sz="1000" dirty="0"/>
           </a:p>
@@ -3307,7 +3307,7 @@
                 <a:ea typeface="Outfit" pitchFamily="34" charset="-122"/>
                 <a:cs typeface="Outfit" pitchFamily="34" charset="-120"/>
               </a:rPr>
-              <a:t>6.NS.4</a:t>
+              <a:t>6.NOS.4</a:t>
             </a:r>
             <a:endParaRPr lang="en-US" sz="900" dirty="0"/>
           </a:p>
@@ -4436,7 +4436,7 @@
                 <a:ea typeface="Outfit" pitchFamily="34" charset="-122"/>
                 <a:cs typeface="Outfit" pitchFamily="34" charset="-120"/>
               </a:rPr>
-              <a:t>6.NS.4</a:t>
+              <a:t>6.NOS.4</a:t>
             </a:r>
             <a:endParaRPr lang="en-US" sz="900" dirty="0"/>
           </a:p>
@@ -5640,7 +5640,7 @@
                 <a:ea typeface="Outfit" pitchFamily="34" charset="-122"/>
                 <a:cs typeface="Outfit" pitchFamily="34" charset="-120"/>
               </a:rPr>
-              <a:t>6.NS.4</a:t>
+              <a:t>6.NOS.4</a:t>
             </a:r>
             <a:endParaRPr lang="en-US" sz="900" dirty="0"/>
           </a:p>
@@ -6976,7 +6976,7 @@
                 <a:ea typeface="Outfit" pitchFamily="34" charset="-122"/>
                 <a:cs typeface="Outfit" pitchFamily="34" charset="-120"/>
               </a:rPr>
-              <a:t>6.NS.4</a:t>
+              <a:t>6.NOS.4</a:t>
             </a:r>
             <a:endParaRPr lang="en-US" sz="900" dirty="0"/>
           </a:p>
@@ -8172,7 +8172,7 @@
                 <a:ea typeface="Outfit" pitchFamily="34" charset="-122"/>
                 <a:cs typeface="Outfit" pitchFamily="34" charset="-120"/>
               </a:rPr>
-              <a:t>6.NS.4</a:t>
+              <a:t>6.NOS.4</a:t>
             </a:r>
             <a:endParaRPr lang="en-US" sz="900" dirty="0"/>
           </a:p>
@@ -9234,7 +9234,7 @@
                 <a:ea typeface="Outfit" pitchFamily="34" charset="-122"/>
                 <a:cs typeface="Outfit" pitchFamily="34" charset="-120"/>
               </a:rPr>
-              <a:t>6.NS.4</a:t>
+              <a:t>6.NOS.4</a:t>
             </a:r>
             <a:endParaRPr lang="en-US" sz="900" dirty="0"/>
           </a:p>
@@ -9911,7 +9911,7 @@
                 <a:ea typeface="Hanken Grotesk" pitchFamily="34" charset="-122"/>
                 <a:cs typeface="Hanken Grotesk" pitchFamily="34" charset="-120"/>
               </a:rPr>
-              <a:t>The baker has 48 cookies and 32 brownies and wants identical boxes with none left over. How does the GCF tell her the most boxes she can make?</a:t>
+              <a:t>A florist has 18 roses and 24 tulips and wants identical bouquets with no flowers left over. How does the GCF tell her the most bouquets she can make?</a:t>
             </a:r>
             <a:endParaRPr lang="en-US" sz="1000" dirty="0"/>
           </a:p>
@@ -10199,7 +10199,7 @@
                 <a:ea typeface="Outfit" pitchFamily="34" charset="-122"/>
                 <a:cs typeface="Outfit" pitchFamily="34" charset="-120"/>
               </a:rPr>
-              <a:t>6.NS.4</a:t>
+              <a:t>6.NOS.4</a:t>
             </a:r>
             <a:endParaRPr lang="en-US" sz="900" dirty="0"/>
           </a:p>
@@ -11116,7 +11116,7 @@
                 <a:ea typeface="Outfit" pitchFamily="34" charset="-122"/>
                 <a:cs typeface="Outfit" pitchFamily="34" charset="-120"/>
               </a:rPr>
-              <a:t>6.NS.4</a:t>
+              <a:t>6.NOS.4</a:t>
             </a:r>
             <a:endParaRPr lang="en-US" sz="900" dirty="0"/>
           </a:p>
@@ -12244,7 +12244,7 @@
                 <a:ea typeface="Outfit" pitchFamily="34" charset="-122"/>
                 <a:cs typeface="Outfit" pitchFamily="34" charset="-120"/>
               </a:rPr>
-              <a:t>6.NS.4</a:t>
+              <a:t>6.NOS.4</a:t>
             </a:r>
             <a:endParaRPr lang="en-US" sz="900" dirty="0"/>
           </a:p>
@@ -13677,7 +13677,7 @@
                 <a:ea typeface="Outfit" pitchFamily="34" charset="-122"/>
                 <a:cs typeface="Outfit" pitchFamily="34" charset="-120"/>
               </a:rPr>
-              <a:t>6.NS.4</a:t>
+              <a:t>6.NOS.4</a:t>
             </a:r>
             <a:endParaRPr lang="en-US" sz="900" dirty="0"/>
           </a:p>
@@ -14491,7 +14491,7 @@
                 <a:ea typeface="Outfit" pitchFamily="34" charset="-122"/>
                 <a:cs typeface="Outfit" pitchFamily="34" charset="-120"/>
               </a:rPr>
-              <a:t>6.NS.4</a:t>
+              <a:t>6.NOS.4</a:t>
             </a:r>
             <a:endParaRPr lang="en-US" sz="900" dirty="0"/>
           </a:p>
@@ -15598,7 +15598,7 @@
                 <a:ea typeface="Outfit" pitchFamily="34" charset="-122"/>
                 <a:cs typeface="Outfit" pitchFamily="34" charset="-120"/>
               </a:rPr>
-              <a:t>6.NS.4</a:t>
+              <a:t>6.NOS.4</a:t>
             </a:r>
             <a:endParaRPr lang="en-US" sz="900" dirty="0"/>
           </a:p>
@@ -16705,7 +16705,7 @@
                 <a:ea typeface="Outfit" pitchFamily="34" charset="-122"/>
                 <a:cs typeface="Outfit" pitchFamily="34" charset="-120"/>
               </a:rPr>
-              <a:t>6.NS.4</a:t>
+              <a:t>6.NOS.4</a:t>
             </a:r>
             <a:endParaRPr lang="en-US" sz="900" dirty="0"/>
           </a:p>
@@ -17121,7 +17121,7 @@
                 <a:ea typeface="Hanken Grotesk" pitchFamily="34" charset="-122"/>
                 <a:cs typeface="Hanken Grotesk" pitchFamily="34" charset="-120"/>
               </a:rPr>
-              <a:t>The baker has 48 cookies and 32 brownies and wants identical boxes with none left over. How does the GCF tell her the most boxes she can make?</a:t>
+              <a:t>A florist has 18 roses and 24 tulips and wants identical bouquets with no flowers left over. How does the GCF tell her the most bouquets she can make?</a:t>
             </a:r>
             <a:endParaRPr lang="en-US" sz="1400" dirty="0"/>
           </a:p>
@@ -17812,7 +17812,7 @@
                 <a:ea typeface="Outfit" pitchFamily="34" charset="-122"/>
                 <a:cs typeface="Outfit" pitchFamily="34" charset="-120"/>
               </a:rPr>
-              <a:t>6.NS.4</a:t>
+              <a:t>6.NOS.4</a:t>
             </a:r>
             <a:endParaRPr lang="en-US" sz="900" dirty="0"/>
           </a:p>
@@ -18919,7 +18919,7 @@
                 <a:ea typeface="Outfit" pitchFamily="34" charset="-122"/>
                 <a:cs typeface="Outfit" pitchFamily="34" charset="-120"/>
               </a:rPr>
-              <a:t>6.NS.4</a:t>
+              <a:t>6.NOS.4</a:t>
             </a:r>
             <a:endParaRPr lang="en-US" sz="900" dirty="0"/>
           </a:p>
@@ -19979,7 +19979,7 @@
                 <a:ea typeface="Outfit" pitchFamily="34" charset="-122"/>
                 <a:cs typeface="Outfit" pitchFamily="34" charset="-120"/>
               </a:rPr>
-              <a:t>6.NS.4</a:t>
+              <a:t>6.NOS.4</a:t>
             </a:r>
             <a:endParaRPr lang="en-US" sz="900" dirty="0"/>
           </a:p>
@@ -20947,7 +20947,7 @@
                 <a:ea typeface="Outfit" pitchFamily="34" charset="-122"/>
                 <a:cs typeface="Outfit" pitchFamily="34" charset="-120"/>
               </a:rPr>
-              <a:t>6.NS.4</a:t>
+              <a:t>6.NOS.4</a:t>
             </a:r>
             <a:endParaRPr lang="en-US" sz="900" dirty="0"/>
           </a:p>
